--- a/figures/ppt/MCTS-IMPSY-prediction-algorithm.pptx
+++ b/figures/ppt/MCTS-IMPSY-prediction-algorithm.pptx
@@ -4355,10 +4355,10 @@
       </p:pic>
       <p:pic>
         <p:nvPicPr>
-          <p:cNvPr id="54" name="Graphic 53">
-            <a:extLst>
-              <a:ext uri="{FF2B5EF4-FFF2-40B4-BE49-F238E27FC236}">
-                <a16:creationId xmlns:a16="http://schemas.microsoft.com/office/drawing/2014/main" id="{FE94D81A-67C6-2210-6A08-A4B1BF6404B5}"/>
+          <p:cNvPr id="55" name="Graphic 54">
+            <a:extLst>
+              <a:ext uri="{FF2B5EF4-FFF2-40B4-BE49-F238E27FC236}">
+                <a16:creationId xmlns:a16="http://schemas.microsoft.com/office/drawing/2014/main" id="{768542B7-063E-ADEC-DA63-8F4F566822CF}"/>
               </a:ext>
             </a:extLst>
           </p:cNvPr>
@@ -4372,42 +4372,6 @@
             <a:extLst>
               <a:ext uri="{96DAC541-7B7A-43D3-8B79-37D633B846F1}">
                 <asvg:svgBlip xmlns:asvg="http://schemas.microsoft.com/office/drawing/2016/SVG/main" r:embed="rId11"/>
-              </a:ext>
-            </a:extLst>
-          </a:blip>
-          <a:stretch>
-            <a:fillRect/>
-          </a:stretch>
-        </p:blipFill>
-        <p:spPr>
-          <a:xfrm>
-            <a:off x="3074267" y="3063345"/>
-            <a:ext cx="257930" cy="117682"/>
-          </a:xfrm>
-          <a:prstGeom prst="rect">
-            <a:avLst/>
-          </a:prstGeom>
-        </p:spPr>
-      </p:pic>
-      <p:pic>
-        <p:nvPicPr>
-          <p:cNvPr id="55" name="Graphic 54">
-            <a:extLst>
-              <a:ext uri="{FF2B5EF4-FFF2-40B4-BE49-F238E27FC236}">
-                <a16:creationId xmlns:a16="http://schemas.microsoft.com/office/drawing/2014/main" id="{768542B7-063E-ADEC-DA63-8F4F566822CF}"/>
-              </a:ext>
-            </a:extLst>
-          </p:cNvPr>
-          <p:cNvPicPr>
-            <a:picLocks noChangeAspect="1"/>
-          </p:cNvPicPr>
-          <p:nvPr/>
-        </p:nvPicPr>
-        <p:blipFill>
-          <a:blip r:embed="rId12">
-            <a:extLst>
-              <a:ext uri="{96DAC541-7B7A-43D3-8B79-37D633B846F1}">
-                <asvg:svgBlip xmlns:asvg="http://schemas.microsoft.com/office/drawing/2016/SVG/main" r:embed="rId13"/>
               </a:ext>
             </a:extLst>
           </a:blip>
@@ -4891,10 +4855,10 @@
           <p:nvPr/>
         </p:nvPicPr>
         <p:blipFill>
-          <a:blip r:embed="rId14">
+          <a:blip r:embed="rId12">
             <a:extLst>
               <a:ext uri="{96DAC541-7B7A-43D3-8B79-37D633B846F1}">
-                <asvg:svgBlip xmlns:asvg="http://schemas.microsoft.com/office/drawing/2016/SVG/main" r:embed="rId15"/>
+                <asvg:svgBlip xmlns:asvg="http://schemas.microsoft.com/office/drawing/2016/SVG/main" r:embed="rId13"/>
               </a:ext>
             </a:extLst>
           </a:blip>
@@ -5015,8 +4979,8 @@
         </p:nvSpPr>
         <p:spPr>
           <a:xfrm>
-            <a:off x="4497452" y="2578668"/>
-            <a:ext cx="2238375" cy="1323439"/>
+            <a:off x="4498903" y="2662617"/>
+            <a:ext cx="2238375" cy="1015663"/>
           </a:xfrm>
           <a:prstGeom prst="rect">
             <a:avLst/>
@@ -5039,7 +5003,7 @@
                   </a:schemeClr>
                 </a:solidFill>
               </a:rPr>
-              <a:t>The action space (GMM) for a leaf node is generated with an MDRNN</a:t>
+              <a:t>The action space for a leaf node is generated</a:t>
             </a:r>
           </a:p>
         </p:txBody>
@@ -5055,13 +5019,14 @@
           </p:cNvPr>
           <p:cNvCxnSpPr>
             <a:cxnSpLocks/>
+            <a:endCxn id="75" idx="7"/>
           </p:cNvCxnSpPr>
           <p:nvPr/>
         </p:nvCxnSpPr>
         <p:spPr>
           <a:xfrm flipH="1">
-            <a:off x="2455069" y="3686888"/>
-            <a:ext cx="973931" cy="542212"/>
+            <a:off x="2761799" y="3686888"/>
+            <a:ext cx="667201" cy="459115"/>
           </a:xfrm>
           <a:prstGeom prst="straightConnector1">
             <a:avLst/>
@@ -5104,7 +5069,7 @@
         </p:nvSpPr>
         <p:spPr>
           <a:xfrm>
-            <a:off x="2138362" y="4242036"/>
+            <a:off x="2221147" y="4053242"/>
             <a:ext cx="633413" cy="633413"/>
           </a:xfrm>
           <a:prstGeom prst="ellipse">
@@ -5159,10 +5124,10 @@
           <p:nvPr/>
         </p:nvPicPr>
         <p:blipFill>
-          <a:blip r:embed="rId14">
+          <a:blip r:embed="rId12">
             <a:extLst>
               <a:ext uri="{96DAC541-7B7A-43D3-8B79-37D633B846F1}">
-                <asvg:svgBlip xmlns:asvg="http://schemas.microsoft.com/office/drawing/2016/SVG/main" r:embed="rId15"/>
+                <asvg:svgBlip xmlns:asvg="http://schemas.microsoft.com/office/drawing/2016/SVG/main" r:embed="rId13"/>
               </a:ext>
             </a:extLst>
           </a:blip>
@@ -5195,10 +5160,10 @@
           <p:nvPr/>
         </p:nvPicPr>
         <p:blipFill>
-          <a:blip r:embed="rId16">
+          <a:blip r:embed="rId14">
             <a:extLst>
               <a:ext uri="{96DAC541-7B7A-43D3-8B79-37D633B846F1}">
-                <asvg:svgBlip xmlns:asvg="http://schemas.microsoft.com/office/drawing/2016/SVG/main" r:embed="rId17"/>
+                <asvg:svgBlip xmlns:asvg="http://schemas.microsoft.com/office/drawing/2016/SVG/main" r:embed="rId15"/>
               </a:ext>
             </a:extLst>
           </a:blip>
@@ -5208,7 +5173,7 @@
         </p:blipFill>
         <p:spPr>
           <a:xfrm>
-            <a:off x="2312631" y="4294369"/>
+            <a:off x="2395416" y="4105575"/>
             <a:ext cx="292297" cy="521960"/>
           </a:xfrm>
           <a:prstGeom prst="rect">
@@ -5232,7 +5197,7 @@
         </p:nvCxnSpPr>
         <p:spPr>
           <a:xfrm flipH="1">
-            <a:off x="2936974" y="4555349"/>
+            <a:off x="3019759" y="4366555"/>
             <a:ext cx="436594" cy="0"/>
           </a:xfrm>
           <a:prstGeom prst="straightConnector1">
@@ -5277,7 +5242,7 @@
         </p:nvSpPr>
         <p:spPr>
           <a:xfrm>
-            <a:off x="3343277" y="4039481"/>
+            <a:off x="3426062" y="3850687"/>
             <a:ext cx="3398868" cy="1015663"/>
           </a:xfrm>
           <a:prstGeom prst="rect">
@@ -5301,7 +5266,7 @@
                   </a:schemeClr>
                 </a:solidFill>
               </a:rPr>
-              <a:t>Expansion: A new child node is sampled from the GMM and added to the tree.</a:t>
+              <a:t>Expansion: A new child node is sampled from the action space and added.</a:t>
             </a:r>
           </a:p>
         </p:txBody>
@@ -5316,13 +5281,14 @@
             </a:extLst>
           </p:cNvPr>
           <p:cNvCxnSpPr>
+            <a:cxnSpLocks/>
             <a:stCxn id="75" idx="4"/>
           </p:cNvCxnSpPr>
           <p:nvPr/>
         </p:nvCxnSpPr>
         <p:spPr>
           <a:xfrm rot="5400000">
-            <a:off x="1893676" y="4886906"/>
+            <a:off x="1976461" y="4698112"/>
             <a:ext cx="572851" cy="549936"/>
           </a:xfrm>
           <a:prstGeom prst="curvedConnector3">
@@ -5367,7 +5333,7 @@
         </p:nvSpPr>
         <p:spPr>
           <a:xfrm>
-            <a:off x="1641732" y="5462678"/>
+            <a:off x="1724517" y="5273884"/>
             <a:ext cx="526801" cy="526801"/>
           </a:xfrm>
           <a:prstGeom prst="ellipse">
@@ -5423,10 +5389,10 @@
           <p:nvPr/>
         </p:nvPicPr>
         <p:blipFill>
-          <a:blip r:embed="rId18">
+          <a:blip r:embed="rId16">
             <a:extLst>
               <a:ext uri="{96DAC541-7B7A-43D3-8B79-37D633B846F1}">
-                <asvg:svgBlip xmlns:asvg="http://schemas.microsoft.com/office/drawing/2016/SVG/main" r:embed="rId19"/>
+                <asvg:svgBlip xmlns:asvg="http://schemas.microsoft.com/office/drawing/2016/SVG/main" r:embed="rId17"/>
               </a:ext>
             </a:extLst>
           </a:blip>
@@ -5436,7 +5402,7 @@
         </p:blipFill>
         <p:spPr>
           <a:xfrm>
-            <a:off x="1762257" y="5481728"/>
+            <a:off x="1845042" y="5292934"/>
             <a:ext cx="277123" cy="461872"/>
           </a:xfrm>
           <a:prstGeom prst="rect">
@@ -5460,7 +5426,7 @@
         </p:nvCxnSpPr>
         <p:spPr>
           <a:xfrm rot="16200000" flipH="1">
-            <a:off x="1893296" y="6009558"/>
+            <a:off x="1976081" y="5820764"/>
             <a:ext cx="878046" cy="866644"/>
           </a:xfrm>
           <a:prstGeom prst="curvedConnector3">
@@ -5507,7 +5473,7 @@
         </p:nvSpPr>
         <p:spPr>
           <a:xfrm>
-            <a:off x="2502240" y="6881904"/>
+            <a:off x="2585025" y="6693110"/>
             <a:ext cx="526801" cy="526801"/>
           </a:xfrm>
           <a:prstGeom prst="ellipse">
@@ -5563,10 +5529,10 @@
           <p:nvPr/>
         </p:nvPicPr>
         <p:blipFill>
-          <a:blip r:embed="rId20">
+          <a:blip r:embed="rId18">
             <a:extLst>
               <a:ext uri="{96DAC541-7B7A-43D3-8B79-37D633B846F1}">
-                <asvg:svgBlip xmlns:asvg="http://schemas.microsoft.com/office/drawing/2016/SVG/main" r:embed="rId21"/>
+                <asvg:svgBlip xmlns:asvg="http://schemas.microsoft.com/office/drawing/2016/SVG/main" r:embed="rId19"/>
               </a:ext>
             </a:extLst>
           </a:blip>
@@ -5576,7 +5542,7 @@
         </p:blipFill>
         <p:spPr>
           <a:xfrm>
-            <a:off x="2566048" y="6919627"/>
+            <a:off x="2648833" y="6730833"/>
             <a:ext cx="451355" cy="451355"/>
           </a:xfrm>
           <a:prstGeom prst="rect">
@@ -5598,7 +5564,7 @@
         </p:nvSpPr>
         <p:spPr>
           <a:xfrm>
-            <a:off x="2055472" y="6171811"/>
+            <a:off x="2138257" y="5983017"/>
             <a:ext cx="514318" cy="461665"/>
           </a:xfrm>
           <a:prstGeom prst="rect">
@@ -5645,7 +5611,7 @@
         </p:nvCxnSpPr>
         <p:spPr>
           <a:xfrm flipH="1">
-            <a:off x="2906683" y="6015781"/>
+            <a:off x="2989468" y="5826987"/>
             <a:ext cx="436594" cy="0"/>
           </a:xfrm>
           <a:prstGeom prst="straightConnector1">
@@ -5690,7 +5656,7 @@
         </p:nvSpPr>
         <p:spPr>
           <a:xfrm>
-            <a:off x="3233371" y="5496025"/>
+            <a:off x="3316156" y="5307231"/>
             <a:ext cx="3398868" cy="1015663"/>
           </a:xfrm>
           <a:prstGeom prst="rect">
@@ -5733,7 +5699,7 @@
         </p:nvSpPr>
         <p:spPr>
           <a:xfrm rot="5400000">
-            <a:off x="2263135" y="7553881"/>
+            <a:off x="2354866" y="7264143"/>
             <a:ext cx="370191" cy="289849"/>
           </a:xfrm>
           <a:prstGeom prst="rightArrow">
@@ -5792,10 +5758,10 @@
           <p:nvPr/>
         </p:nvPicPr>
         <p:blipFill>
-          <a:blip r:embed="rId10">
+          <a:blip r:embed="rId20">
             <a:extLst>
               <a:ext uri="{96DAC541-7B7A-43D3-8B79-37D633B846F1}">
-                <asvg:svgBlip xmlns:asvg="http://schemas.microsoft.com/office/drawing/2016/SVG/main" r:embed="rId11"/>
+                <asvg:svgBlip xmlns:asvg="http://schemas.microsoft.com/office/drawing/2016/SVG/main" r:embed="rId21"/>
               </a:ext>
             </a:extLst>
           </a:blip>
@@ -5805,7 +5771,7 @@
         </p:blipFill>
         <p:spPr>
           <a:xfrm>
-            <a:off x="634277" y="8144215"/>
+            <a:off x="726008" y="7854477"/>
             <a:ext cx="471242" cy="215007"/>
           </a:xfrm>
           <a:prstGeom prst="rect">
@@ -5828,10 +5794,10 @@
           <p:nvPr/>
         </p:nvPicPr>
         <p:blipFill>
-          <a:blip r:embed="rId12">
+          <a:blip r:embed="rId10">
             <a:extLst>
               <a:ext uri="{96DAC541-7B7A-43D3-8B79-37D633B846F1}">
-                <asvg:svgBlip xmlns:asvg="http://schemas.microsoft.com/office/drawing/2016/SVG/main" r:embed="rId13"/>
+                <asvg:svgBlip xmlns:asvg="http://schemas.microsoft.com/office/drawing/2016/SVG/main" r:embed="rId11"/>
               </a:ext>
             </a:extLst>
           </a:blip>
@@ -5841,7 +5807,7 @@
         </p:blipFill>
         <p:spPr>
           <a:xfrm>
-            <a:off x="1298299" y="7969481"/>
+            <a:off x="1390030" y="7679743"/>
             <a:ext cx="534025" cy="534025"/>
           </a:xfrm>
           <a:prstGeom prst="rect">
@@ -5863,7 +5829,7 @@
         </p:nvSpPr>
         <p:spPr>
           <a:xfrm>
-            <a:off x="1187731" y="8168070"/>
+            <a:off x="1279462" y="7878332"/>
             <a:ext cx="213667" cy="167295"/>
           </a:xfrm>
           <a:prstGeom prst="rightArrow">
@@ -5931,7 +5897,7 @@
         </p:blipFill>
         <p:spPr>
           <a:xfrm>
-            <a:off x="1999549" y="7981546"/>
+            <a:off x="2091280" y="7691808"/>
             <a:ext cx="292297" cy="521960"/>
           </a:xfrm>
           <a:prstGeom prst="rect">
@@ -5953,7 +5919,7 @@
         </p:nvSpPr>
         <p:spPr>
           <a:xfrm>
-            <a:off x="1777922" y="8172242"/>
+            <a:off x="1869653" y="7882504"/>
             <a:ext cx="213667" cy="167295"/>
           </a:xfrm>
           <a:prstGeom prst="rightArrow">
@@ -6007,7 +5973,7 @@
         </p:nvSpPr>
         <p:spPr>
           <a:xfrm>
-            <a:off x="2303067" y="8162675"/>
+            <a:off x="2394798" y="7872937"/>
             <a:ext cx="213667" cy="167295"/>
           </a:xfrm>
           <a:prstGeom prst="rightArrow">
@@ -6075,7 +6041,7 @@
         </p:blipFill>
         <p:spPr>
           <a:xfrm>
-            <a:off x="2513089" y="7972356"/>
+            <a:off x="2604820" y="7682618"/>
             <a:ext cx="324204" cy="540341"/>
           </a:xfrm>
           <a:prstGeom prst="rect">
@@ -6097,7 +6063,7 @@
         </p:nvSpPr>
         <p:spPr>
           <a:xfrm>
-            <a:off x="2873573" y="8170675"/>
+            <a:off x="2965304" y="7880937"/>
             <a:ext cx="213667" cy="167295"/>
           </a:xfrm>
           <a:prstGeom prst="rightArrow">
@@ -6151,7 +6117,7 @@
         </p:nvSpPr>
         <p:spPr>
           <a:xfrm>
-            <a:off x="553999" y="7915908"/>
+            <a:off x="645730" y="7626170"/>
             <a:ext cx="3398868" cy="705207"/>
           </a:xfrm>
           <a:prstGeom prst="rect">
@@ -6205,7 +6171,7 @@
         </p:nvCxnSpPr>
         <p:spPr>
           <a:xfrm flipH="1">
-            <a:off x="3952867" y="8205644"/>
+            <a:off x="4044598" y="7915906"/>
             <a:ext cx="436594" cy="0"/>
           </a:xfrm>
           <a:prstGeom prst="straightConnector1">
@@ -6250,7 +6216,7 @@
         </p:nvSpPr>
         <p:spPr>
           <a:xfrm>
-            <a:off x="4407172" y="7851701"/>
+            <a:off x="4498903" y="7561963"/>
             <a:ext cx="2433542" cy="707886"/>
           </a:xfrm>
           <a:prstGeom prst="rect">
@@ -6293,7 +6259,7 @@
         </p:nvSpPr>
         <p:spPr>
           <a:xfrm>
-            <a:off x="3431783" y="8162675"/>
+            <a:off x="3523514" y="7872937"/>
             <a:ext cx="213667" cy="167295"/>
           </a:xfrm>
           <a:prstGeom prst="rightArrow">
@@ -6348,10 +6314,10 @@
           <p:nvPr/>
         </p:nvPicPr>
         <p:blipFill>
-          <a:blip r:embed="rId12">
+          <a:blip r:embed="rId10">
             <a:extLst>
               <a:ext uri="{96DAC541-7B7A-43D3-8B79-37D633B846F1}">
-                <asvg:svgBlip xmlns:asvg="http://schemas.microsoft.com/office/drawing/2016/SVG/main" r:embed="rId13"/>
+                <asvg:svgBlip xmlns:asvg="http://schemas.microsoft.com/office/drawing/2016/SVG/main" r:embed="rId11"/>
               </a:ext>
             </a:extLst>
           </a:blip>
@@ -6361,7 +6327,7 @@
         </p:blipFill>
         <p:spPr>
           <a:xfrm>
-            <a:off x="3486226" y="7990737"/>
+            <a:off x="3577957" y="7700999"/>
             <a:ext cx="521960" cy="521960"/>
           </a:xfrm>
           <a:prstGeom prst="rect">
@@ -6383,7 +6349,7 @@
         </p:nvSpPr>
         <p:spPr>
           <a:xfrm>
-            <a:off x="2995285" y="7942211"/>
+            <a:off x="3087016" y="7652473"/>
             <a:ext cx="514318" cy="461665"/>
           </a:xfrm>
           <a:prstGeom prst="rect">
@@ -6436,7 +6402,7 @@
         </p:blipFill>
         <p:spPr>
           <a:xfrm>
-            <a:off x="1940371" y="9216031"/>
+            <a:off x="2046269" y="8817221"/>
             <a:ext cx="205151" cy="522203"/>
           </a:xfrm>
           <a:prstGeom prst="rect">
@@ -6460,8 +6426,8 @@
         </p:nvCxnSpPr>
         <p:spPr>
           <a:xfrm rot="5400000">
-            <a:off x="1914525" y="8763001"/>
-            <a:ext cx="561977" cy="295276"/>
+            <a:off x="2052183" y="8425986"/>
+            <a:ext cx="468774" cy="296626"/>
           </a:xfrm>
           <a:prstGeom prst="curvedConnector3">
             <a:avLst/>
@@ -6504,8 +6470,8 @@
         </p:nvCxnSpPr>
         <p:spPr>
           <a:xfrm rot="16200000" flipH="1">
-            <a:off x="2300290" y="8777291"/>
-            <a:ext cx="571500" cy="276224"/>
+            <a:off x="2436218" y="8443355"/>
+            <a:ext cx="557525" cy="350642"/>
           </a:xfrm>
           <a:prstGeom prst="curvedConnector3">
             <a:avLst>
@@ -6562,7 +6528,7 @@
         </p:blipFill>
         <p:spPr>
           <a:xfrm>
-            <a:off x="2572734" y="9136550"/>
+            <a:off x="2650827" y="8770304"/>
             <a:ext cx="572294" cy="715366"/>
           </a:xfrm>
           <a:prstGeom prst="rect">
@@ -6586,8 +6552,8 @@
         </p:nvCxnSpPr>
         <p:spPr>
           <a:xfrm rot="5400000">
-            <a:off x="2103879" y="8911555"/>
-            <a:ext cx="590578" cy="12700"/>
+            <a:off x="2171741" y="8555374"/>
+            <a:ext cx="620106" cy="64029"/>
           </a:xfrm>
           <a:prstGeom prst="curvedConnector3">
             <a:avLst>
@@ -6630,7 +6596,7 @@
         </p:nvSpPr>
         <p:spPr>
           <a:xfrm>
-            <a:off x="2122836" y="9122122"/>
+            <a:off x="2231123" y="8776840"/>
             <a:ext cx="514318" cy="461665"/>
           </a:xfrm>
           <a:prstGeom prst="rect">
@@ -6671,7 +6637,7 @@
         </p:nvCxnSpPr>
         <p:spPr>
           <a:xfrm flipH="1">
-            <a:off x="3172605" y="9477132"/>
+            <a:off x="3298253" y="8961480"/>
             <a:ext cx="436594" cy="0"/>
           </a:xfrm>
           <a:prstGeom prst="straightConnector1">
@@ -6716,7 +6682,7 @@
         </p:nvSpPr>
         <p:spPr>
           <a:xfrm>
-            <a:off x="3613136" y="8961628"/>
+            <a:off x="3668902" y="8431591"/>
             <a:ext cx="3156028" cy="1015663"/>
           </a:xfrm>
           <a:prstGeom prst="rect">
@@ -6761,8 +6727,8 @@
         </p:nvCxnSpPr>
         <p:spPr>
           <a:xfrm rot="5400000">
-            <a:off x="2384530" y="9907403"/>
-            <a:ext cx="596394" cy="258057"/>
+            <a:off x="2586836" y="9364542"/>
+            <a:ext cx="430563" cy="228809"/>
           </a:xfrm>
           <a:prstGeom prst="curvedConnector3">
             <a:avLst/>
@@ -6805,8 +6771,8 @@
         </p:nvCxnSpPr>
         <p:spPr>
           <a:xfrm rot="5400000">
-            <a:off x="2077172" y="10027173"/>
-            <a:ext cx="590578" cy="12700"/>
+            <a:off x="2245415" y="9465853"/>
+            <a:ext cx="469969" cy="12700"/>
           </a:xfrm>
           <a:prstGeom prst="curvedConnector3">
             <a:avLst>
@@ -6851,8 +6817,8 @@
         </p:nvCxnSpPr>
         <p:spPr>
           <a:xfrm rot="16200000" flipH="1">
-            <a:off x="1808479" y="9961527"/>
-            <a:ext cx="593565" cy="149680"/>
+            <a:off x="2037689" y="9463771"/>
+            <a:ext cx="352881" cy="121256"/>
           </a:xfrm>
           <a:prstGeom prst="curvedConnector3">
             <a:avLst>
@@ -6895,7 +6861,7 @@
         </p:nvSpPr>
         <p:spPr>
           <a:xfrm>
-            <a:off x="2039380" y="10333150"/>
+            <a:off x="2138257" y="9635866"/>
             <a:ext cx="696038" cy="369332"/>
           </a:xfrm>
           <a:prstGeom prst="rect">
@@ -6932,7 +6898,7 @@
         </p:nvCxnSpPr>
         <p:spPr>
           <a:xfrm flipH="1">
-            <a:off x="2728672" y="10505832"/>
+            <a:off x="2747007" y="9809694"/>
             <a:ext cx="436594" cy="0"/>
           </a:xfrm>
           <a:prstGeom prst="straightConnector1">
@@ -6977,7 +6943,7 @@
         </p:nvSpPr>
         <p:spPr>
           <a:xfrm>
-            <a:off x="3152160" y="10179401"/>
+            <a:off x="3171313" y="9471515"/>
             <a:ext cx="3688554" cy="707886"/>
           </a:xfrm>
           <a:prstGeom prst="rect">
@@ -7022,8 +6988,8 @@
         </p:nvCxnSpPr>
         <p:spPr>
           <a:xfrm>
-            <a:off x="2387399" y="10645332"/>
-            <a:ext cx="0" cy="632268"/>
+            <a:off x="2466769" y="9949194"/>
+            <a:ext cx="795" cy="428520"/>
           </a:xfrm>
           <a:prstGeom prst="straightConnector1">
             <a:avLst/>
@@ -7067,7 +7033,7 @@
         </p:nvSpPr>
         <p:spPr>
           <a:xfrm>
-            <a:off x="-91856" y="11242758"/>
+            <a:off x="163035" y="10298251"/>
             <a:ext cx="5652866" cy="707886"/>
           </a:xfrm>
           <a:prstGeom prst="rect">
@@ -7096,6 +7062,42 @@
           </a:p>
         </p:txBody>
       </p:sp>
+      <p:pic>
+        <p:nvPicPr>
+          <p:cNvPr id="162" name="Graphic 161">
+            <a:extLst>
+              <a:ext uri="{FF2B5EF4-FFF2-40B4-BE49-F238E27FC236}">
+                <a16:creationId xmlns:a16="http://schemas.microsoft.com/office/drawing/2014/main" id="{2347C463-6715-849F-6B0D-561C61A58A1F}"/>
+              </a:ext>
+            </a:extLst>
+          </p:cNvPr>
+          <p:cNvPicPr>
+            <a:picLocks noChangeAspect="1"/>
+          </p:cNvPicPr>
+          <p:nvPr/>
+        </p:nvPicPr>
+        <p:blipFill>
+          <a:blip r:embed="rId30">
+            <a:extLst>
+              <a:ext uri="{96DAC541-7B7A-43D3-8B79-37D633B846F1}">
+                <asvg:svgBlip xmlns:asvg="http://schemas.microsoft.com/office/drawing/2016/SVG/main" r:embed="rId31"/>
+              </a:ext>
+            </a:extLst>
+          </a:blip>
+          <a:stretch>
+            <a:fillRect/>
+          </a:stretch>
+        </p:blipFill>
+        <p:spPr>
+          <a:xfrm>
+            <a:off x="3089836" y="2786898"/>
+            <a:ext cx="224301" cy="400538"/>
+          </a:xfrm>
+          <a:prstGeom prst="rect">
+            <a:avLst/>
+          </a:prstGeom>
+        </p:spPr>
+      </p:pic>
     </p:spTree>
     <p:extLst>
       <p:ext uri="{BB962C8B-B14F-4D97-AF65-F5344CB8AC3E}">
